--- a/策划大作业_纸上花火/纸上花火_答辩PPT.pptx
+++ b/策划大作业_纸上花火/纸上花火_答辩PPT.pptx
@@ -6149,7 +6149,7 @@
                 <a:ea typeface="思源宋体"/>
                 <a:cs typeface="思源宋体"/>
               </a:rPr>
-              <a:t>亮点 · 会说话的旧物</a:t>
+              <a:t>亮点 · 会说话的旧物（8 件 = 8 片记忆）</a:t>
             </a:r>
           </a:p>
         </p:txBody>
@@ -6250,7 +6250,25 @@
                 <a:ea typeface="微软雅黑"/>
                 <a:cs typeface="微软雅黑"/>
               </a:rPr>
-              <a:t>· 拍立得 → 拍照留念；信纸 → 写一封寄不出的信。</a:t>
+              <a:t>· 大头贴墙 → 合照；拍立得 → 拍照留念；日历 → 那年夏天的倒数。</a:t>
+            </a:r>
+          </a:p>
+          <a:p>
+            <a:pPr>
+              <a:spcAft>
+                <a:spcPts val="1000"/>
+              </a:spcAft>
+            </a:pPr>
+            <a:r>
+              <a:rPr sz="1700" b="0">
+                <a:solidFill>
+                  <a:srgbClr val="E8DFD3"/>
+                </a:solidFill>
+                <a:latin typeface="微软雅黑"/>
+                <a:ea typeface="微软雅黑"/>
+                <a:cs typeface="微软雅黑"/>
+              </a:rPr>
+              <a:t>· 信纸 → 写一封寄不出的信。集齐 8 片记忆，解锁结局。</a:t>
             </a:r>
           </a:p>
         </p:txBody>
